--- a/capstone/docs/report.pptx
+++ b/capstone/docs/report.pptx
@@ -17,7 +17,6 @@
     <p:sldId id="265" r:id="rId11"/>
     <p:sldId id="266" r:id="rId12"/>
     <p:sldId id="267" r:id="rId13"/>
-    <p:sldId id="268" r:id="rId14"/>
   </p:sldIdLst>
   <p:sldSz cx="9144000" cy="5143500" type="screen16x9"/>
   <p:notesSz cx="6858000" cy="9144000"/>
@@ -3599,189 +3598,6 @@
             <a:r>
               <a:rPr/>
               <a:t> allows the pipeline to run offline.</a:t>
-            </a:r>
-          </a:p>
-        </p:txBody>
-      </p:sp>
-    </p:spTree>
-  </p:cSld>
-</p:sld>
-</file>
-
-<file path=ppt/slides/slide13.xml><?xml version="1.0" encoding="utf-8"?>
-<p:sld xmlns:a="http://schemas.openxmlformats.org/drawingml/2006/main" xmlns:r="http://schemas.openxmlformats.org/officeDocument/2006/relationships" xmlns:p="http://schemas.openxmlformats.org/presentationml/2006/main">
-  <p:cSld>
-    <p:spTree>
-      <p:nvGrpSpPr>
-        <p:cNvPr id="1" name=""/>
-        <p:cNvGrpSpPr/>
-        <p:nvPr/>
-      </p:nvGrpSpPr>
-      <p:grpSpPr>
-        <a:xfrm>
-          <a:off x="0" y="0"/>
-          <a:ext cx="0" cy="0"/>
-          <a:chOff x="0" y="0"/>
-          <a:chExt cx="0" cy="0"/>
-        </a:xfrm>
-      </p:grpSpPr>
-      <p:sp>
-        <p:nvSpPr>
-          <p:cNvPr id="2" name="Title 1"/>
-          <p:cNvSpPr>
-            <a:spLocks noGrp="1"/>
-          </p:cNvSpPr>
-          <p:nvPr>
-            <p:ph type="title"/>
-          </p:nvPr>
-        </p:nvSpPr>
-        <p:spPr/>
-        <p:txBody>
-          <a:bodyPr/>
-          <a:lstStyle/>
-          <a:p>
-            <a:pPr lvl="0" indent="0" marL="0">
-              <a:buNone/>
-            </a:pPr>
-            <a:r>
-              <a:rPr/>
-              <a:t>References</a:t>
-            </a:r>
-          </a:p>
-        </p:txBody>
-      </p:sp>
-      <p:sp>
-        <p:nvSpPr>
-          <p:cNvPr id="3" name="Content Placeholder 2"/>
-          <p:cNvSpPr>
-            <a:spLocks noGrp="1"/>
-          </p:cNvSpPr>
-          <p:nvPr>
-            <p:ph idx="1"/>
-          </p:nvPr>
-        </p:nvSpPr>
-        <p:spPr/>
-        <p:txBody>
-          <a:bodyPr/>
-          <a:lstStyle/>
-          <a:p>
-            <a:pPr lvl="0" indent="-342900" marL="342900">
-              <a:buAutoNum type="arabicPeriod"/>
-            </a:pPr>
-            <a:r>
-              <a:rPr/>
-              <a:t>TST, </a:t>
-            </a:r>
-            <a:r>
-              <a:rPr i="1"/>
-              <a:t>Livro de Súmulas, Orientações Jurisprudenciais e Precedentes Normativos</a:t>
-            </a:r>
-            <a:r>
-              <a:rPr/>
-              <a:t>. https://www.tst.jus.br/livro-de-sumulas-ojs-e-pns</a:t>
-            </a:r>
-          </a:p>
-          <a:p>
-            <a:pPr lvl="1"/>
-            <a:r>
-              <a:rPr/>
-              <a:t>The data source: an official public act, not protected by copyright.</a:t>
-            </a:r>
-          </a:p>
-          <a:p>
-            <a:pPr lvl="0" indent="-342900" marL="342900">
-              <a:buAutoNum type="arabicPeriod"/>
-            </a:pPr>
-            <a:r>
-              <a:rPr/>
-              <a:t>Reimers, N., Gurevych, I. </a:t>
-            </a:r>
-            <a:r>
-              <a:rPr i="1"/>
-              <a:t>Sentence-BERT: Sentence Embeddings using Siamese BERT-Networks</a:t>
-            </a:r>
-            <a:r>
-              <a:rPr/>
-              <a:t>, 2019.</a:t>
-            </a:r>
-          </a:p>
-          <a:p>
-            <a:pPr lvl="1"/>
-            <a:r>
-              <a:rPr/>
-              <a:t>In one line: how to train transformer networks to produce high-quality sentence embeddings (the model family used here).</a:t>
-            </a:r>
-          </a:p>
-          <a:p>
-            <a:pPr lvl="0" indent="-342900" marL="342900">
-              <a:buAutoNum type="arabicPeriod"/>
-            </a:pPr>
-            <a:r>
-              <a:rPr/>
-              <a:t>McInnes, L., Healy, J., Melville, J. </a:t>
-            </a:r>
-            <a:r>
-              <a:rPr i="1"/>
-              <a:t>UMAP: Uniform Manifold Approximation and Projection for Dimension Reduction</a:t>
-            </a:r>
-            <a:r>
-              <a:rPr/>
-              <a:t>, 2018.</a:t>
-            </a:r>
-          </a:p>
-          <a:p>
-            <a:pPr lvl="1"/>
-            <a:r>
-              <a:rPr/>
-              <a:t>In one line: the dimensionality-reduction method used for the 2D projection.</a:t>
-            </a:r>
-          </a:p>
-          <a:p>
-            <a:pPr lvl="0" indent="-342900" marL="342900">
-              <a:buAutoNum type="arabicPeriod"/>
-            </a:pPr>
-            <a:r>
-              <a:rPr/>
-              <a:t>Campello, R. et al. </a:t>
-            </a:r>
-            <a:r>
-              <a:rPr i="1"/>
-              <a:t>Density-Based Clustering Based on Hierarchical Density Estimates (HDBSCAN)</a:t>
-            </a:r>
-            <a:r>
-              <a:rPr/>
-              <a:t>, 2013.</a:t>
-            </a:r>
-          </a:p>
-          <a:p>
-            <a:pPr lvl="1"/>
-            <a:r>
-              <a:rPr/>
-              <a:t>In one line: the density-based clustering method used to group the corpus.</a:t>
-            </a:r>
-          </a:p>
-          <a:p>
-            <a:pPr lvl="0" indent="-342900" marL="342900">
-              <a:buAutoNum type="arabicPeriod"/>
-            </a:pPr>
-            <a:r>
-              <a:rPr/>
-              <a:t>Liu, F. T., Ting, K. M., Zhou, Z.-H. </a:t>
-            </a:r>
-            <a:r>
-              <a:rPr i="1"/>
-              <a:t>Isolation Forest</a:t>
-            </a:r>
-            <a:r>
-              <a:rPr/>
-              <a:t>, 2008.</a:t>
-            </a:r>
-          </a:p>
-          <a:p>
-            <a:pPr lvl="1"/>
-            <a:r>
-              <a:rPr/>
-              <a:t>In one line: the anomaly-detection method used to score unusual verbetes.</a:t>
             </a:r>
           </a:p>
         </p:txBody>
